--- a/data/deep_dives/carteira_atlantis_fidc_051f0c07/exports/documentary_comparison.pptx
+++ b/data/deep_dives/carteira_atlantis_fidc_051f0c07/exports/documentary_comparison.pptx
@@ -4286,7 +4286,7 @@
                       <a:r>
                         <a:rPr sz="1300" b="1">
                           <a:solidFill>
-                            <a:srgbClr val="1F1F1F"/>
+                            <a:srgbClr val="FFFFFF"/>
                           </a:solidFill>
                           <a:latin typeface="Calibri"/>
                         </a:rPr>
@@ -4296,7 +4296,7 @@
                   </a:txBody>
                   <a:tcPr marL="91440" marR="91440" marT="41148" marB="41148" anchor="ctr">
                     <a:solidFill>
-                      <a:srgbClr val="EC7000"/>
+                      <a:srgbClr val="FF6200"/>
                     </a:solidFill>
                     <a:lnL>
                       <a:noFill/>
@@ -4335,7 +4335,7 @@
                       <a:r>
                         <a:rPr sz="1300" b="1">
                           <a:solidFill>
-                            <a:srgbClr val="1F1F1F"/>
+                            <a:srgbClr val="FFFFFF"/>
                           </a:solidFill>
                           <a:latin typeface="Calibri"/>
                         </a:rPr>
@@ -4345,7 +4345,7 @@
                   </a:txBody>
                   <a:tcPr marL="91440" marR="91440" marT="41148" marB="41148" anchor="ctr">
                     <a:solidFill>
-                      <a:srgbClr val="EC7000"/>
+                      <a:srgbClr val="FF6200"/>
                     </a:solidFill>
                     <a:lnL>
                       <a:noFill/>
@@ -5123,7 +5123,7 @@
                       <a:r>
                         <a:rPr sz="1300" b="1">
                           <a:solidFill>
-                            <a:srgbClr val="1F1F1F"/>
+                            <a:srgbClr val="FFFFFF"/>
                           </a:solidFill>
                           <a:latin typeface="Calibri"/>
                         </a:rPr>
@@ -5133,7 +5133,7 @@
                   </a:txBody>
                   <a:tcPr marL="91440" marR="91440" marT="41148" marB="41148" anchor="ctr">
                     <a:solidFill>
-                      <a:srgbClr val="EC7000"/>
+                      <a:srgbClr val="FF6200"/>
                     </a:solidFill>
                     <a:lnL>
                       <a:noFill/>
@@ -5172,7 +5172,7 @@
                       <a:r>
                         <a:rPr sz="1300" b="1">
                           <a:solidFill>
-                            <a:srgbClr val="1F1F1F"/>
+                            <a:srgbClr val="FFFFFF"/>
                           </a:solidFill>
                           <a:latin typeface="Calibri"/>
                         </a:rPr>
@@ -5182,7 +5182,7 @@
                   </a:txBody>
                   <a:tcPr marL="91440" marR="91440" marT="41148" marB="41148" anchor="ctr">
                     <a:solidFill>
-                      <a:srgbClr val="EC7000"/>
+                      <a:srgbClr val="FF6200"/>
                     </a:solidFill>
                     <a:lnL>
                       <a:noFill/>
@@ -5682,7 +5682,7 @@
                           </a:solidFill>
                           <a:latin typeface="Calibri"/>
                         </a:rPr>
-                        <a:t>Não localizado nas fontes acessíveis desta leitura</a:t>
+                        <a:t>-</a:t>
                       </a:r>
                     </a:p>
                   </a:txBody>
@@ -5886,7 +5886,7 @@
                       <a:r>
                         <a:rPr sz="1300" b="1">
                           <a:solidFill>
-                            <a:srgbClr val="1F1F1F"/>
+                            <a:srgbClr val="FFFFFF"/>
                           </a:solidFill>
                           <a:latin typeface="Calibri"/>
                         </a:rPr>
@@ -5896,7 +5896,7 @@
                   </a:txBody>
                   <a:tcPr marL="91440" marR="91440" marT="41148" marB="41148" anchor="ctr">
                     <a:solidFill>
-                      <a:srgbClr val="EC7000"/>
+                      <a:srgbClr val="FF6200"/>
                     </a:solidFill>
                     <a:lnL>
                       <a:noFill/>
@@ -5935,7 +5935,7 @@
                       <a:r>
                         <a:rPr sz="1300" b="1">
                           <a:solidFill>
-                            <a:srgbClr val="1F1F1F"/>
+                            <a:srgbClr val="FFFFFF"/>
                           </a:solidFill>
                           <a:latin typeface="Calibri"/>
                         </a:rPr>
@@ -5945,7 +5945,7 @@
                   </a:txBody>
                   <a:tcPr marL="91440" marR="91440" marT="41148" marB="41148" anchor="ctr">
                     <a:solidFill>
-                      <a:srgbClr val="EC7000"/>
+                      <a:srgbClr val="FF6200"/>
                     </a:solidFill>
                     <a:lnL>
                       <a:noFill/>
@@ -6723,7 +6723,7 @@
                       <a:r>
                         <a:rPr sz="1300" b="1">
                           <a:solidFill>
-                            <a:srgbClr val="1F1F1F"/>
+                            <a:srgbClr val="FFFFFF"/>
                           </a:solidFill>
                           <a:latin typeface="Calibri"/>
                         </a:rPr>
@@ -6733,7 +6733,7 @@
                   </a:txBody>
                   <a:tcPr marL="91440" marR="91440" marT="41148" marB="41148" anchor="ctr">
                     <a:solidFill>
-                      <a:srgbClr val="EC7000"/>
+                      <a:srgbClr val="FF6200"/>
                     </a:solidFill>
                     <a:lnL>
                       <a:noFill/>
@@ -6772,7 +6772,7 @@
                       <a:r>
                         <a:rPr sz="1300" b="1">
                           <a:solidFill>
-                            <a:srgbClr val="1F1F1F"/>
+                            <a:srgbClr val="FFFFFF"/>
                           </a:solidFill>
                           <a:latin typeface="Calibri"/>
                         </a:rPr>
@@ -6782,7 +6782,7 @@
                   </a:txBody>
                   <a:tcPr marL="91440" marR="91440" marT="41148" marB="41148" anchor="ctr">
                     <a:solidFill>
-                      <a:srgbClr val="EC7000"/>
+                      <a:srgbClr val="FF6200"/>
                     </a:solidFill>
                     <a:lnL>
                       <a:noFill/>
@@ -7368,7 +7368,7 @@
                       <a:r>
                         <a:rPr sz="1300" b="1">
                           <a:solidFill>
-                            <a:srgbClr val="1F1F1F"/>
+                            <a:srgbClr val="FFFFFF"/>
                           </a:solidFill>
                           <a:latin typeface="Calibri"/>
                         </a:rPr>
@@ -7378,7 +7378,7 @@
                   </a:txBody>
                   <a:tcPr marL="91440" marR="91440" marT="41148" marB="41148" anchor="ctr">
                     <a:solidFill>
-                      <a:srgbClr val="EC7000"/>
+                      <a:srgbClr val="FF6200"/>
                     </a:solidFill>
                     <a:lnL>
                       <a:noFill/>
@@ -7417,7 +7417,7 @@
                       <a:r>
                         <a:rPr sz="1300" b="1">
                           <a:solidFill>
-                            <a:srgbClr val="1F1F1F"/>
+                            <a:srgbClr val="FFFFFF"/>
                           </a:solidFill>
                           <a:latin typeface="Calibri"/>
                         </a:rPr>
@@ -7427,7 +7427,7 @@
                   </a:txBody>
                   <a:tcPr marL="91440" marR="91440" marT="41148" marB="41148" anchor="ctr">
                     <a:solidFill>
-                      <a:srgbClr val="EC7000"/>
+                      <a:srgbClr val="FF6200"/>
                     </a:solidFill>
                     <a:lnL>
                       <a:noFill/>
@@ -7735,7 +7735,7 @@
                           </a:solidFill>
                           <a:latin typeface="Calibri"/>
                         </a:rPr>
-                        <a:t>Sênior 2ª série: 360 dias; data efetiva por primeira integralização não localizada</a:t>
+                        <a:t>Sênior 2ª série: 360 dias</a:t>
                       </a:r>
                     </a:p>
                   </a:txBody>
@@ -7939,7 +7939,7 @@
                       <a:r>
                         <a:rPr sz="1300" b="1">
                           <a:solidFill>
-                            <a:srgbClr val="1F1F1F"/>
+                            <a:srgbClr val="FFFFFF"/>
                           </a:solidFill>
                           <a:latin typeface="Calibri"/>
                         </a:rPr>
@@ -7949,7 +7949,7 @@
                   </a:txBody>
                   <a:tcPr marL="91440" marR="91440" marT="41148" marB="41148" anchor="ctr">
                     <a:solidFill>
-                      <a:srgbClr val="EC7000"/>
+                      <a:srgbClr val="FF6200"/>
                     </a:solidFill>
                     <a:lnL>
                       <a:noFill/>
@@ -7988,7 +7988,7 @@
                       <a:r>
                         <a:rPr sz="1300" b="1">
                           <a:solidFill>
-                            <a:srgbClr val="1F1F1F"/>
+                            <a:srgbClr val="FFFFFF"/>
                           </a:solidFill>
                           <a:latin typeface="Calibri"/>
                         </a:rPr>
@@ -7998,7 +7998,7 @@
                   </a:txBody>
                   <a:tcPr marL="91440" marR="91440" marT="41148" marB="41148" anchor="ctr">
                     <a:solidFill>
-                      <a:srgbClr val="EC7000"/>
+                      <a:srgbClr val="FF6200"/>
                     </a:solidFill>
                     <a:lnL>
                       <a:noFill/>
@@ -8090,7 +8090,7 @@
                           </a:solidFill>
                           <a:latin typeface="Calibri"/>
                         </a:rPr>
-                        <a:t>0, 18% a.a./PL com custódia; mínimo não localizado</a:t>
+                        <a:t>0, 18% a.a./PL com custódia</a:t>
                       </a:r>
                     </a:p>
                   </a:txBody>
@@ -8186,7 +8186,7 @@
                           </a:solidFill>
                           <a:latin typeface="Calibri"/>
                         </a:rPr>
-                        <a:t>0, 06% a.a./PL; mínimo não localizado</a:t>
+                        <a:t>0, 06% a.a./PL</a:t>
                       </a:r>
                     </a:p>
                   </a:txBody>
@@ -8606,7 +8606,7 @@
                       <a:r>
                         <a:rPr sz="1300" b="1">
                           <a:solidFill>
-                            <a:srgbClr val="1F1F1F"/>
+                            <a:srgbClr val="FFFFFF"/>
                           </a:solidFill>
                           <a:latin typeface="Calibri"/>
                         </a:rPr>
@@ -8616,7 +8616,7 @@
                   </a:txBody>
                   <a:tcPr marL="91440" marR="91440" marT="41148" marB="41148" anchor="ctr">
                     <a:solidFill>
-                      <a:srgbClr val="EC7000"/>
+                      <a:srgbClr val="FF6200"/>
                     </a:solidFill>
                     <a:lnL>
                       <a:noFill/>
@@ -8655,7 +8655,7 @@
                       <a:r>
                         <a:rPr sz="1300" b="1">
                           <a:solidFill>
-                            <a:srgbClr val="1F1F1F"/>
+                            <a:srgbClr val="FFFFFF"/>
                           </a:solidFill>
                           <a:latin typeface="Calibri"/>
                         </a:rPr>
@@ -8665,7 +8665,7 @@
                   </a:txBody>
                   <a:tcPr marL="91440" marR="91440" marT="41148" marB="41148" anchor="ctr">
                     <a:solidFill>
-                      <a:srgbClr val="EC7000"/>
+                      <a:srgbClr val="FF6200"/>
                     </a:solidFill>
                     <a:lnL>
                       <a:noFill/>
@@ -8779,7 +8779,7 @@
                           </a:solidFill>
                           <a:latin typeface="Calibri"/>
                         </a:rPr>
-                        <a:t>Direitos creditórios / PL e cotas subordinadas / PL; validar fórmula contratual antes de comparar</a:t>
+                        <a:t>Direitos creditórios / PL e cotas subordinadas / PL</a:t>
                       </a:r>
                     </a:p>
                   </a:txBody>
@@ -9069,7 +9069,7 @@
                           </a:solidFill>
                           <a:latin typeface="Calibri"/>
                         </a:rPr>
-                        <a:t>Sem competência IME carregada em cache local</a:t>
+                        <a:t>-</a:t>
                       </a:r>
                     </a:p>
                   </a:txBody>
